--- a/O for 4 - Is Australia Doing Well.pptx
+++ b/O for 4 - Is Australia Doing Well.pptx
@@ -1805,7 +1805,7 @@
                 <a:ea typeface="Calibri" pitchFamily="34" charset="-122"/>
                 <a:cs typeface="Calibri" pitchFamily="34" charset="-120"/>
               </a:rPr>
-              <a:t>Atharva Aher   ·   Mokshithh Kethari</a:t>
+              <a:t>Atharva Aher (SID 55088718)   ·   Mokshithh Kethari (SID 550809791)</a:t>
             </a:r>
             <a:endParaRPr lang="en-US" sz="1800" dirty="0"/>
           </a:p>
